--- a/public/fun/pack/pptx/newspro/카드뉴스프리미엄_50_오늘의한마디_골든레드.pptx
+++ b/public/fun/pack/pptx/newspro/카드뉴스프리미엄_50_오늘의한마디_골든레드.pptx
@@ -113,12 +113,12 @@
   <p:extLst>
     <p:ext uri="{521415D9-36F7-43E2-AB2F-B90AF26B5E84}">
       <p14:sectionLst xmlns:p14="http://schemas.microsoft.com/office/powerpoint/2010/main">
-        <p14:section name="시작" id="{2C83C81E-E2D9-4C10-952A-236AD942A768}">
+        <p14:section name="시작" id="{9B0947EE-B2B6-4244-8984-5A03351B3326}">
           <p14:sldIdLst>
             <p14:sldId id="256"/>
           </p14:sldIdLst>
         </p14:section>
-        <p14:section name="본문" id="{E112F3CC-CA3E-4518-925B-974C18702B70}">
+        <p14:section name="본문" id="{FEF26F85-5290-4635-984E-07542F969128}">
           <p14:sldIdLst>
             <p14:sldId id="257"/>
             <p14:sldId id="258"/>
@@ -127,7 +127,7 @@
             <p14:sldId id="261"/>
           </p14:sldIdLst>
         </p14:section>
-        <p14:section name="마무리" id="{7271378D-2362-4967-9B77-E478CC2080D3}">
+        <p14:section name="마무리" id="{BB9196D7-279C-4137-941C-EAEE6587D6DC}">
           <p14:sldIdLst>
             <p14:sldId id="262"/>
           </p14:sldIdLst>
@@ -1511,7 +1511,7 @@
             </a:lvl1pPr>
           </a:lstStyle>
           <a:p>
-            <a:fld id="{D45CDCCD-0809-4526-8EAC-0849A7A2B042}" type="slidenum">
+            <a:fld id="{53CEE053-1E5E-43B3-B446-C1697540F78D}" type="slidenum">
               <a:rPr lang="en-US"/>
               <a:t>‹#›</a:t>
             </a:fld>
@@ -2490,7 +2490,7 @@
             </a:lvl1pPr>
           </a:lstStyle>
           <a:p>
-            <a:fld id="{4747AB3B-3E95-4FF3-A679-BED4F67C1CE0}" type="slidenum">
+            <a:fld id="{BB89AF9C-04EE-416F-B393-30CB662FB33C}" type="slidenum">
               <a:rPr lang="en-US"/>
               <a:t>‹#›</a:t>
             </a:fld>
@@ -3497,7 +3497,7 @@
             </a:lvl1pPr>
           </a:lstStyle>
           <a:p>
-            <a:fld id="{C725C99B-DB15-4B5A-81FD-B6BE0D12F02D}" type="slidenum">
+            <a:fld id="{87CF4A73-3FCF-4CC5-837D-C6BB6DC2E11E}" type="slidenum">
               <a:rPr lang="en-US"/>
               <a:t>‹#›</a:t>
             </a:fld>
@@ -4616,7 +4616,7 @@
           <a:p>
             <a:r>
               <a:rPr lang="ko-KR"/>
-              <a:t>올해의 마지막 한 주 보내는 법</a:t>
+              <a:t>마무리 한 주 보내는 법</a:t>
             </a:r>
           </a:p>
         </p:txBody>
@@ -4745,7 +4745,7 @@
           <a:bodyPr/>
           <a:lstStyle/>
           <a:p>
-            <a:fld id="{7B8ABAB3-C3B8-4879-B3E2-A4299803C28F}" type="slidenum">
+            <a:fld id="{36AD2BEA-7332-4B42-858C-BCC5B2C2B25A}" type="slidenum">
               <a:rPr lang="en-US"/>
               <a:t>‹#›</a:t>
             </a:fld>
@@ -4911,7 +4911,7 @@
           <a:bodyPr/>
           <a:lstStyle/>
           <a:p>
-            <a:fld id="{F45D8CAD-45F5-40A3-BF18-8A16B7A5AE9B}" type="slidenum">
+            <a:fld id="{E3506417-0DF6-464D-9188-8281787CF7E5}" type="slidenum">
               <a:rPr lang="en-US"/>
               <a:t>‹#›</a:t>
             </a:fld>
@@ -5077,7 +5077,7 @@
           <a:bodyPr/>
           <a:lstStyle/>
           <a:p>
-            <a:fld id="{9D10FF4B-C672-4D71-8831-16F2F385D3A3}" type="slidenum">
+            <a:fld id="{AA89E627-1047-4D9D-B47E-7DA0B1C46603}" type="slidenum">
               <a:rPr lang="en-US"/>
               <a:t>‹#›</a:t>
             </a:fld>
@@ -5243,7 +5243,7 @@
           <a:bodyPr/>
           <a:lstStyle/>
           <a:p>
-            <a:fld id="{4A3862D5-6496-47FF-B76E-DF0CF52B75A4}" type="slidenum">
+            <a:fld id="{28007750-4AC1-4D8D-BFA7-15E30A5CEADD}" type="slidenum">
               <a:rPr lang="en-US"/>
               <a:t>‹#›</a:t>
             </a:fld>
@@ -5409,7 +5409,7 @@
           <a:bodyPr/>
           <a:lstStyle/>
           <a:p>
-            <a:fld id="{9B96D092-BA35-44BA-99F5-B1B4D82E4E3B}" type="slidenum">
+            <a:fld id="{6090E548-F645-4034-AB8A-E59F8FE8EDE1}" type="slidenum">
               <a:rPr lang="en-US"/>
               <a:t>‹#›</a:t>
             </a:fld>
